--- a/lessons/02_deep_learning/deep_learning.pptx
+++ b/lessons/02_deep_learning/deep_learning.pptx
@@ -212,7 +212,7 @@
           <a:p>
             <a:fld id="{99D4630A-6D3B-4C97-A7DC-509EB0048625}" type="datetimeFigureOut">
               <a:rPr lang="it-CH" smtClean="0"/>
-              <a:t>29.06.25</a:t>
+              <a:t>07.07.25</a:t>
             </a:fld>
             <a:endParaRPr lang="it-CH"/>
           </a:p>
@@ -2293,7 +2293,7 @@
           <a:p>
             <a:fld id="{2A147C38-CC24-4E9D-9FE1-BE5105214113}" type="datetimeFigureOut">
               <a:rPr lang="it-CH" smtClean="0"/>
-              <a:t>29.06.25</a:t>
+              <a:t>07.07.25</a:t>
             </a:fld>
             <a:endParaRPr lang="it-CH"/>
           </a:p>
@@ -2493,7 +2493,7 @@
           <a:p>
             <a:fld id="{2A147C38-CC24-4E9D-9FE1-BE5105214113}" type="datetimeFigureOut">
               <a:rPr lang="it-CH" smtClean="0"/>
-              <a:t>29.06.25</a:t>
+              <a:t>07.07.25</a:t>
             </a:fld>
             <a:endParaRPr lang="it-CH"/>
           </a:p>
@@ -2703,7 +2703,7 @@
           <a:p>
             <a:fld id="{2A147C38-CC24-4E9D-9FE1-BE5105214113}" type="datetimeFigureOut">
               <a:rPr lang="it-CH" smtClean="0"/>
-              <a:t>29.06.25</a:t>
+              <a:t>07.07.25</a:t>
             </a:fld>
             <a:endParaRPr lang="it-CH"/>
           </a:p>
@@ -2903,7 +2903,7 @@
           <a:p>
             <a:fld id="{2A147C38-CC24-4E9D-9FE1-BE5105214113}" type="datetimeFigureOut">
               <a:rPr lang="it-CH" smtClean="0"/>
-              <a:t>29.06.25</a:t>
+              <a:t>07.07.25</a:t>
             </a:fld>
             <a:endParaRPr lang="it-CH"/>
           </a:p>
@@ -3179,7 +3179,7 @@
           <a:p>
             <a:fld id="{2A147C38-CC24-4E9D-9FE1-BE5105214113}" type="datetimeFigureOut">
               <a:rPr lang="it-CH" smtClean="0"/>
-              <a:t>29.06.25</a:t>
+              <a:t>07.07.25</a:t>
             </a:fld>
             <a:endParaRPr lang="it-CH"/>
           </a:p>
@@ -3447,7 +3447,7 @@
           <a:p>
             <a:fld id="{2A147C38-CC24-4E9D-9FE1-BE5105214113}" type="datetimeFigureOut">
               <a:rPr lang="it-CH" smtClean="0"/>
-              <a:t>29.06.25</a:t>
+              <a:t>07.07.25</a:t>
             </a:fld>
             <a:endParaRPr lang="it-CH"/>
           </a:p>
@@ -3862,7 +3862,7 @@
           <a:p>
             <a:fld id="{2A147C38-CC24-4E9D-9FE1-BE5105214113}" type="datetimeFigureOut">
               <a:rPr lang="it-CH" smtClean="0"/>
-              <a:t>29.06.25</a:t>
+              <a:t>07.07.25</a:t>
             </a:fld>
             <a:endParaRPr lang="it-CH"/>
           </a:p>
@@ -4004,7 +4004,7 @@
           <a:p>
             <a:fld id="{2A147C38-CC24-4E9D-9FE1-BE5105214113}" type="datetimeFigureOut">
               <a:rPr lang="it-CH" smtClean="0"/>
-              <a:t>29.06.25</a:t>
+              <a:t>07.07.25</a:t>
             </a:fld>
             <a:endParaRPr lang="it-CH"/>
           </a:p>
@@ -4117,7 +4117,7 @@
           <a:p>
             <a:fld id="{2A147C38-CC24-4E9D-9FE1-BE5105214113}" type="datetimeFigureOut">
               <a:rPr lang="it-CH" smtClean="0"/>
-              <a:t>29.06.25</a:t>
+              <a:t>07.07.25</a:t>
             </a:fld>
             <a:endParaRPr lang="it-CH"/>
           </a:p>
@@ -4430,7 +4430,7 @@
           <a:p>
             <a:fld id="{2A147C38-CC24-4E9D-9FE1-BE5105214113}" type="datetimeFigureOut">
               <a:rPr lang="it-CH" smtClean="0"/>
-              <a:t>29.06.25</a:t>
+              <a:t>07.07.25</a:t>
             </a:fld>
             <a:endParaRPr lang="it-CH"/>
           </a:p>
@@ -4719,7 +4719,7 @@
           <a:p>
             <a:fld id="{2A147C38-CC24-4E9D-9FE1-BE5105214113}" type="datetimeFigureOut">
               <a:rPr lang="it-CH" smtClean="0"/>
-              <a:t>29.06.25</a:t>
+              <a:t>07.07.25</a:t>
             </a:fld>
             <a:endParaRPr lang="it-CH"/>
           </a:p>
@@ -4962,7 +4962,7 @@
           <a:p>
             <a:fld id="{2A147C38-CC24-4E9D-9FE1-BE5105214113}" type="datetimeFigureOut">
               <a:rPr lang="it-CH" smtClean="0"/>
-              <a:t>29.06.25</a:t>
+              <a:t>07.07.25</a:t>
             </a:fld>
             <a:endParaRPr lang="it-CH"/>
           </a:p>
@@ -10246,10 +10246,10 @@
       </p:pic>
       <p:pic>
         <p:nvPicPr>
-          <p:cNvPr id="7" name="Immagine 6" descr="\documentclass{article}&#10;\usepackage{amsmath}&#10;\pagestyle{empty}&#10;\usepackage{bm}&#10;\usepackage{color}&#10;\newcommand{\pmeas}{{\bf p}}&#10;\newcommand{\umeas}{{\bf u}}&#10;\newcommand{\ymeas}{{\bf y}}&#10;\newcommand{\yo}{{\bf y}^{\rm o} }&#10;&#10;\newcommand{\nin}{n_u} &#10;\newcommand{\ny}{n_y} &#10;\newcommand{\nx}{n_x} &#10;\newcommand{\np}{n_p} &#10;\newcommand{\red}[1]{{\color{red}#1}}&#10;\usepackage{xcolor}&#10;\definecolor{dyel}{RGB}{155,155,0}&#10;\begin{document}&#10;&#10; \begin{align*}&#10; \mathcal{L}^{(q)} = \frac{1}{L} \sum_{i=0}^{L} \left\|\hat{y}(t_q+i) - y(t_q+i)\right\|^2&#10; \end{align*}&#10;&#10;&#10;&#10;&#10;\end{document}" title="IguanaTex Bitmap Display">
-            <a:extLst>
-              <a:ext uri="{FF2B5EF4-FFF2-40B4-BE49-F238E27FC236}">
-                <a16:creationId xmlns:a16="http://schemas.microsoft.com/office/drawing/2014/main" id="{4EFCEEE0-3825-7355-4B01-28CD913A4F16}"/>
+          <p:cNvPr id="3" name="Picture 2" descr="\documentclass{article}&#10;\usepackage{amsmath}&#10;\pagestyle{empty}&#10;\usepackage{bm}&#10;\usepackage{color}&#10;\newcommand{\pmeas}{{\bf p}}&#10;\newcommand{\umeas}{{\bf u}}&#10;\newcommand{\ymeas}{{\bf y}}&#10;\newcommand{\yo}{{\bf y}^{\rm o} }&#10;&#10;\newcommand{\nin}{n_u} &#10;\newcommand{\ny}{n_y} &#10;\newcommand{\nx}{n_x} &#10;\newcommand{\np}{n_p} &#10;\newcommand{\red}[1]{{\color{red}#1}}&#10;\usepackage{xcolor}&#10;\definecolor{dyel}{RGB}{155,155,0}&#10;\begin{document}&#10;&#10; \begin{align*}&#10; \mathcal{L}^{(j)} = \frac{1}{L} \sum_{i=0}^{L} \left\|\hat{y}(t_j+i) - y(t_j+i)\right\|^2&#10; \end{align*}&#10;&#10;&#10;&#10;&#10;\end{document}" title="IguanaTex Bitmap Display">
+            <a:extLst>
+              <a:ext uri="{FF2B5EF4-FFF2-40B4-BE49-F238E27FC236}">
+                <a16:creationId xmlns:a16="http://schemas.microsoft.com/office/drawing/2014/main" id="{37DB01CE-10B8-7918-1F87-FEA40F88A5F9}"/>
               </a:ext>
             </a:extLst>
           </p:cNvPr>
@@ -10263,13 +10263,7 @@
           </p:nvPr>
         </p:nvPicPr>
         <p:blipFill>
-          <a:blip r:embed="rId7">
-            <a:extLst>
-              <a:ext uri="{28A0092B-C50C-407E-A947-70E740481C1C}">
-                <a14:useLocalDpi xmlns:a14="http://schemas.microsoft.com/office/drawing/2010/main" val="0"/>
-              </a:ext>
-            </a:extLst>
-          </a:blip>
+          <a:blip r:embed="rId7"/>
           <a:stretch>
             <a:fillRect/>
           </a:stretch>
@@ -10277,7 +10271,7 @@
         <p:spPr>
           <a:xfrm>
             <a:off x="856471" y="3565737"/>
-            <a:ext cx="3792318" cy="706909"/>
+            <a:ext cx="3786966" cy="703987"/>
           </a:xfrm>
           <a:prstGeom prst="rect">
             <a:avLst/>
@@ -10286,10 +10280,10 @@
       </p:pic>
       <p:pic>
         <p:nvPicPr>
-          <p:cNvPr id="97" name="Immagine 96" descr="\documentclass{article}&#10;\usepackage{amsmath}&#10;\pagestyle{empty}&#10;\usepackage{bm}&#10;\usepackage{color}&#10;\newcommand{\pmeas}{{\bf p}}&#10;\newcommand{\umeas}{{\bf u}}&#10;\newcommand{\ymeas}{{\bf y}}&#10;\newcommand{\yo}{{\bf y}^{\rm o} }&#10;&#10;\newcommand{\nin}{n_u} &#10;\newcommand{\ny}{n_y} &#10;\newcommand{\nx}{n_x} &#10;\newcommand{\np}{n_p} &#10;\newcommand{\red}[1]{{\color{red}#1}}&#10;\usepackage{xcolor}&#10;\definecolor{dyel}{RGB}{155,155,0}&#10;\begin{document}&#10;&#10; \begin{align*}&#10; \mathcal{L} = \frac{1}{Q} \sum_{q=1}^{Q} \mathcal{L}^{(q)}&#10; \end{align*}&#10;&#10;&#10;&#10;&#10;\end{document}" title="IguanaTex Bitmap Display">
-            <a:extLst>
-              <a:ext uri="{FF2B5EF4-FFF2-40B4-BE49-F238E27FC236}">
-                <a16:creationId xmlns:a16="http://schemas.microsoft.com/office/drawing/2014/main" id="{FC8869E4-0246-8B34-7F5C-BDFCDFBA44BB}"/>
+          <p:cNvPr id="6" name="Picture 5" descr="\documentclass{article}&#10;\usepackage{amsmath}&#10;\pagestyle{empty}&#10;\usepackage{bm}&#10;\usepackage{color}&#10;\newcommand{\pmeas}{{\bf p}}&#10;\newcommand{\umeas}{{\bf u}}&#10;\newcommand{\ymeas}{{\bf y}}&#10;\newcommand{\yo}{{\bf y}^{\rm o} }&#10;&#10;\newcommand{\nin}{n_u} &#10;\newcommand{\ny}{n_y} &#10;\newcommand{\nx}{n_x} &#10;\newcommand{\np}{n_p} &#10;\newcommand{\red}[1]{{\color{red}#1}}&#10;\usepackage{xcolor}&#10;\definecolor{dyel}{RGB}{155,155,0}&#10;\begin{document}&#10;&#10; \begin{align*}&#10; \mathcal{L} = \frac{1}{B} \sum_{j=1}^{B} \mathcal{L}^{(j)}&#10; \end{align*}&#10;&#10;&#10;&#10;&#10;\end{document}" title="IguanaTex Bitmap Display">
+            <a:extLst>
+              <a:ext uri="{FF2B5EF4-FFF2-40B4-BE49-F238E27FC236}">
+                <a16:creationId xmlns:a16="http://schemas.microsoft.com/office/drawing/2014/main" id="{2E577C87-B049-F022-EA67-B18B7577CE38}"/>
               </a:ext>
             </a:extLst>
           </p:cNvPr>
@@ -10303,13 +10297,7 @@
           </p:nvPr>
         </p:nvPicPr>
         <p:blipFill>
-          <a:blip r:embed="rId8">
-            <a:extLst>
-              <a:ext uri="{28A0092B-C50C-407E-A947-70E740481C1C}">
-                <a14:useLocalDpi xmlns:a14="http://schemas.microsoft.com/office/drawing/2010/main" val="0"/>
-              </a:ext>
-            </a:extLst>
-          </a:blip>
+          <a:blip r:embed="rId8"/>
           <a:stretch>
             <a:fillRect/>
           </a:stretch>
@@ -10317,7 +10305,7 @@
         <p:spPr>
           <a:xfrm>
             <a:off x="856471" y="4492202"/>
-            <a:ext cx="1554501" cy="747978"/>
+            <a:ext cx="1553627" cy="752538"/>
           </a:xfrm>
           <a:prstGeom prst="rect">
             <a:avLst/>
@@ -10431,7 +10419,7 @@
                                           </p:stCondLst>
                                         </p:cTn>
                                         <p:tgtEl>
-                                          <p:spTgt spid="7"/>
+                                          <p:spTgt spid="3"/>
                                         </p:tgtEl>
                                         <p:attrNameLst>
                                           <p:attrName>style.visibility</p:attrName>
@@ -10458,7 +10446,7 @@
                                           </p:stCondLst>
                                         </p:cTn>
                                         <p:tgtEl>
-                                          <p:spTgt spid="97"/>
+                                          <p:spTgt spid="6"/>
                                         </p:tgtEl>
                                         <p:attrNameLst>
                                           <p:attrName>style.visibility</p:attrName>
@@ -15443,6 +15431,46 @@
           </a:prstGeom>
         </p:spPr>
       </p:pic>
+      <p:sp>
+        <p:nvSpPr>
+          <p:cNvPr id="6" name="TextBox 5">
+            <a:extLst>
+              <a:ext uri="{FF2B5EF4-FFF2-40B4-BE49-F238E27FC236}">
+                <a16:creationId xmlns:a16="http://schemas.microsoft.com/office/drawing/2014/main" id="{1FAB9BF0-87BB-FD07-956F-06B21EF096D4}"/>
+              </a:ext>
+            </a:extLst>
+          </p:cNvPr>
+          <p:cNvSpPr txBox="1"/>
+          <p:nvPr/>
+        </p:nvSpPr>
+        <p:spPr>
+          <a:xfrm>
+            <a:off x="486034" y="6317029"/>
+            <a:ext cx="11219931" cy="276999"/>
+          </a:xfrm>
+          <a:prstGeom prst="rect">
+            <a:avLst/>
+          </a:prstGeom>
+          <a:noFill/>
+        </p:spPr>
+        <p:txBody>
+          <a:bodyPr wrap="none" rtlCol="0">
+            <a:spAutoFit/>
+          </a:bodyPr>
+          <a:lstStyle/>
+          <a:p>
+            <a:r>
+              <a:rPr lang="en-GB" sz="1200" dirty="0" err="1"/>
+              <a:t>Baydin</a:t>
+            </a:r>
+            <a:r>
+              <a:rPr lang="en-GB" sz="1200" dirty="0"/>
+              <a:t>, A. G., Pearlmutter, B. A., Radul, A. A., &amp; Siskind, J. M. (2018). Automatic differentiation in machine learning: a survey. Journal of machine learning research, 18(153), 1-43.</a:t>
+            </a:r>
+            <a:endParaRPr lang="en-CH" sz="1200" dirty="0"/>
+          </a:p>
+        </p:txBody>
+      </p:sp>
     </p:spTree>
     <p:extLst>
       <p:ext uri="{BB962C8B-B14F-4D97-AF65-F5344CB8AC3E}">
@@ -15821,6 +15849,51 @@
                       </p:childTnLst>
                     </p:cTn>
                   </p:par>
+                  <p:par>
+                    <p:cTn id="33" fill="hold">
+                      <p:stCondLst>
+                        <p:cond delay="indefinite"/>
+                      </p:stCondLst>
+                      <p:childTnLst>
+                        <p:par>
+                          <p:cTn id="34" fill="hold">
+                            <p:stCondLst>
+                              <p:cond delay="0"/>
+                            </p:stCondLst>
+                            <p:childTnLst>
+                              <p:par>
+                                <p:cTn id="35" presetID="1" presetClass="entr" presetSubtype="0" fill="hold" grpId="0" nodeType="clickEffect">
+                                  <p:stCondLst>
+                                    <p:cond delay="0"/>
+                                  </p:stCondLst>
+                                  <p:childTnLst>
+                                    <p:set>
+                                      <p:cBhvr>
+                                        <p:cTn id="36" dur="1" fill="hold">
+                                          <p:stCondLst>
+                                            <p:cond delay="0"/>
+                                          </p:stCondLst>
+                                        </p:cTn>
+                                        <p:tgtEl>
+                                          <p:spTgt spid="6"/>
+                                        </p:tgtEl>
+                                        <p:attrNameLst>
+                                          <p:attrName>style.visibility</p:attrName>
+                                        </p:attrNameLst>
+                                      </p:cBhvr>
+                                      <p:to>
+                                        <p:strVal val="visible"/>
+                                      </p:to>
+                                    </p:set>
+                                  </p:childTnLst>
+                                </p:cTn>
+                              </p:par>
+                            </p:childTnLst>
+                          </p:cTn>
+                        </p:par>
+                      </p:childTnLst>
+                    </p:cTn>
+                  </p:par>
                 </p:childTnLst>
               </p:cTn>
               <p:prevCondLst>
@@ -15849,6 +15922,7 @@
       <p:bldP spid="17" grpId="0"/>
       <p:bldP spid="18" grpId="0"/>
       <p:bldP spid="5" grpId="1"/>
+      <p:bldP spid="6" grpId="0"/>
     </p:bldLst>
   </p:timing>
 </p:sld>
@@ -16225,8 +16299,8 @@
           </a:fontRef>
         </p:style>
       </p:cxnSp>
-      <mc:AlternateContent xmlns:mc="http://schemas.openxmlformats.org/markup-compatibility/2006">
-        <mc:Choice xmlns:a14="http://schemas.microsoft.com/office/drawing/2010/main" Requires="a14">
+      <mc:AlternateContent xmlns:mc="http://schemas.openxmlformats.org/markup-compatibility/2006" xmlns:a14="http://schemas.microsoft.com/office/drawing/2010/main">
+        <mc:Choice Requires="a14">
           <p:sp>
             <p:nvSpPr>
               <p:cNvPr id="2" name="CasellaDiTesto 6">
@@ -16970,7 +17044,7 @@
             </p:txBody>
           </p:sp>
         </mc:Choice>
-        <mc:Fallback>
+        <mc:Fallback xmlns="">
           <p:sp>
             <p:nvSpPr>
               <p:cNvPr id="2" name="CasellaDiTesto 6">
@@ -17253,8 +17327,8 @@
           </a:prstGeom>
         </p:spPr>
       </p:pic>
-      <mc:AlternateContent xmlns:mc="http://schemas.openxmlformats.org/markup-compatibility/2006">
-        <mc:Choice xmlns:a14="http://schemas.microsoft.com/office/drawing/2010/main" Requires="a14">
+      <mc:AlternateContent xmlns:mc="http://schemas.openxmlformats.org/markup-compatibility/2006" xmlns:a14="http://schemas.microsoft.com/office/drawing/2010/main">
+        <mc:Choice Requires="a14">
           <p:sp>
             <p:nvSpPr>
               <p:cNvPr id="5" name="CasellaDiTesto 9">
@@ -17419,7 +17493,7 @@
             </p:txBody>
           </p:sp>
         </mc:Choice>
-        <mc:Fallback>
+        <mc:Fallback xmlns="">
           <p:sp>
             <p:nvSpPr>
               <p:cNvPr id="5" name="CasellaDiTesto 9">
@@ -28909,17 +28983,19 @@
 <file path=ppt/tags/tag11.xml><?xml version="1.0" encoding="utf-8"?>
 <p:tagLst xmlns:a="http://schemas.openxmlformats.org/drawingml/2006/main" xmlns:r="http://schemas.openxmlformats.org/officeDocument/2006/relationships" xmlns:p="http://schemas.openxmlformats.org/presentationml/2006/main">
   <p:tag name="OUTPUTDPI" val="2000"/>
-  <p:tag name="ORIGINALHEIGHT" val="606.6742"/>
-  <p:tag name="ORIGINALWIDTH" val="3254.593"/>
-  <p:tag name="LATEXADDIN" val="\documentclass{article}&#10;\usepackage{amsmath}&#10;\pagestyle{empty}&#10;\usepackage{bm}&#10;\usepackage{color}&#10;\newcommand{\pmeas}{{\bf p}}&#10;\newcommand{\umeas}{{\bf u}}&#10;\newcommand{\ymeas}{{\bf y}}&#10;\newcommand{\yo}{{\bf y}^{\rm o} }&#10;&#10;\newcommand{\nin}{n_u} &#10;\newcommand{\ny}{n_y} &#10;\newcommand{\nx}{n_x} &#10;\newcommand{\np}{n_p} &#10;\newcommand{\red}[1]{{\color{red}#1}}&#10;\usepackage{xcolor}&#10;\definecolor{dyel}{RGB}{155,155,0}&#10;\begin{document}&#10;&#10; \begin{align*}&#10; \mathcal{L}^{(q)} = \frac{1}{L} \sum_{i=0}^{L} \left\|\hat{y}(t_q+i) - y(t_q+i)\right\|^2&#10; \end{align*}&#10;&#10;&#10;&#10;&#10;\end{document}"/>
+  <p:tag name="ORIGINALHEIGHT" val="29"/>
+  <p:tag name="ORIGINALWIDTH" val="156"/>
+  <p:tag name="OUTPUTTYPE" val="PDF"/>
+  <p:tag name="IGUANATEXVERSION" val="160"/>
+  <p:tag name="LATEXADDIN" val="\documentclass{article}&#10;\usepackage{amsmath}&#10;\pagestyle{empty}&#10;\usepackage{bm}&#10;\usepackage{color}&#10;\newcommand{\pmeas}{{\bf p}}&#10;\newcommand{\umeas}{{\bf u}}&#10;\newcommand{\ymeas}{{\bf y}}&#10;\newcommand{\yo}{{\bf y}^{\rm o} }&#10;&#10;\newcommand{\nin}{n_u} &#10;\newcommand{\ny}{n_y} &#10;\newcommand{\nx}{n_x} &#10;\newcommand{\np}{n_p} &#10;\newcommand{\red}[1]{{\color{red}#1}}&#10;\usepackage{xcolor}&#10;\definecolor{dyel}{RGB}{155,155,0}&#10;\begin{document}&#10;&#10; \begin{align*}&#10; \mathcal{L}^{(j)} = \frac{1}{L} \sum_{i=0}^{L} \left\|\hat{y}(t_j+i) - y(t_j+i)\right\|^2&#10; \end{align*}&#10;&#10;&#10;&#10;&#10;\end{document}"/>
   <p:tag name="IGUANATEXSIZE" val="24"/>
-  <p:tag name="IGUANATEXCURSOR" val="483"/>
-  <p:tag name="TRANSPARENCY" val="Vero"/>
+  <p:tag name="IGUANATEXCURSOR" val="518"/>
+  <p:tag name="TRANSPARENCY" val="True"/>
   <p:tag name="LATEXENGINEID" val="0"/>
-  <p:tag name="TEMPFOLDER" val="\\supsi.ch\DTI\HOME\dario.piga\Desktop\Testppt\temp\"/>
+  <p:tag name="TEMPFOLDER" val="/Users/marco.forgione/Library/Containers/com.microsoft.Powerpoint/Data/tmp/TemporaryItems/"/>
   <p:tag name="LATEXFORMHEIGHT" val="312"/>
-  <p:tag name="LATEXFORMWIDTH" val="384"/>
-  <p:tag name="LATEXFORMWRAP" val="Vero"/>
+  <p:tag name="LATEXFORMWIDTH" val="504"/>
+  <p:tag name="LATEXFORMWRAP" val="True"/>
   <p:tag name="BITMAPVECTOR" val="0"/>
 </p:tagLst>
 </file>
@@ -28927,17 +29003,19 @@
 <file path=ppt/tags/tag12.xml><?xml version="1.0" encoding="utf-8"?>
 <p:tagLst xmlns:a="http://schemas.openxmlformats.org/drawingml/2006/main" xmlns:r="http://schemas.openxmlformats.org/officeDocument/2006/relationships" xmlns:p="http://schemas.openxmlformats.org/presentationml/2006/main">
   <p:tag name="OUTPUTDPI" val="2000"/>
-  <p:tag name="ORIGINALHEIGHT" val="641.9197"/>
-  <p:tag name="ORIGINALWIDTH" val="1334.083"/>
-  <p:tag name="LATEXADDIN" val="\documentclass{article}&#10;\usepackage{amsmath}&#10;\pagestyle{empty}&#10;\usepackage{bm}&#10;\usepackage{color}&#10;\newcommand{\pmeas}{{\bf p}}&#10;\newcommand{\umeas}{{\bf u}}&#10;\newcommand{\ymeas}{{\bf y}}&#10;\newcommand{\yo}{{\bf y}^{\rm o} }&#10;&#10;\newcommand{\nin}{n_u} &#10;\newcommand{\ny}{n_y} &#10;\newcommand{\nx}{n_x} &#10;\newcommand{\np}{n_p} &#10;\newcommand{\red}[1]{{\color{red}#1}}&#10;\usepackage{xcolor}&#10;\definecolor{dyel}{RGB}{155,155,0}&#10;\begin{document}&#10;&#10; \begin{align*}&#10; \mathcal{L} = \frac{1}{Q} \sum_{q=1}^{Q} \mathcal{L}^{(q)}&#10; \end{align*}&#10;&#10;&#10;&#10;&#10;\end{document}"/>
+  <p:tag name="ORIGINALHEIGHT" val="31"/>
+  <p:tag name="ORIGINALWIDTH" val="64"/>
+  <p:tag name="OUTPUTTYPE" val="PDF"/>
+  <p:tag name="IGUANATEXVERSION" val="160"/>
+  <p:tag name="LATEXADDIN" val="\documentclass{article}&#10;\usepackage{amsmath}&#10;\pagestyle{empty}&#10;\usepackage{bm}&#10;\usepackage{color}&#10;\newcommand{\pmeas}{{\bf p}}&#10;\newcommand{\umeas}{{\bf u}}&#10;\newcommand{\ymeas}{{\bf y}}&#10;\newcommand{\yo}{{\bf y}^{\rm o} }&#10;&#10;\newcommand{\nin}{n_u} &#10;\newcommand{\ny}{n_y} &#10;\newcommand{\nx}{n_x} &#10;\newcommand{\np}{n_p} &#10;\newcommand{\red}[1]{{\color{red}#1}}&#10;\usepackage{xcolor}&#10;\definecolor{dyel}{RGB}{155,155,0}&#10;\begin{document}&#10;&#10; \begin{align*}&#10; \mathcal{L} = \frac{1}{B} \sum_{j=1}^{B} \mathcal{L}^{(j)}&#10; \end{align*}&#10;&#10;&#10;&#10;&#10;\end{document}"/>
   <p:tag name="IGUANATEXSIZE" val="24"/>
-  <p:tag name="IGUANATEXCURSOR" val="477"/>
-  <p:tag name="TRANSPARENCY" val="Vero"/>
+  <p:tag name="IGUANATEXCURSOR" val="498"/>
+  <p:tag name="TRANSPARENCY" val="True"/>
   <p:tag name="LATEXENGINEID" val="0"/>
-  <p:tag name="TEMPFOLDER" val="\\supsi.ch\DTI\HOME\dario.piga\Desktop\Testppt\temp\"/>
+  <p:tag name="TEMPFOLDER" val="/Users/marco.forgione/Library/Containers/com.microsoft.Powerpoint/Data/tmp/TemporaryItems/"/>
   <p:tag name="LATEXFORMHEIGHT" val="312"/>
-  <p:tag name="LATEXFORMWIDTH" val="384"/>
-  <p:tag name="LATEXFORMWRAP" val="Vero"/>
+  <p:tag name="LATEXFORMWIDTH" val="504"/>
+  <p:tag name="LATEXFORMWRAP" val="True"/>
   <p:tag name="BITMAPVECTOR" val="0"/>
 </p:tagLst>
 </file>
